--- a/PPT RECCE.pptx
+++ b/PPT RECCE.pptx
@@ -5,10 +5,10 @@
     <p:sldMasterId id="2147483720" r:id="rId4"/>
   </p:sldMasterIdLst>
   <p:notesMasterIdLst>
-    <p:notesMasterId r:id="rId20"/>
+    <p:notesMasterId r:id="rId21"/>
   </p:notesMasterIdLst>
   <p:handoutMasterIdLst>
-    <p:handoutMasterId r:id="rId21"/>
+    <p:handoutMasterId r:id="rId22"/>
   </p:handoutMasterIdLst>
   <p:sldIdLst>
     <p:sldId id="269" r:id="rId5"/>
@@ -25,7 +25,8 @@
     <p:sldId id="274" r:id="rId16"/>
     <p:sldId id="292" r:id="rId17"/>
     <p:sldId id="279" r:id="rId18"/>
-    <p:sldId id="285" r:id="rId19"/>
+    <p:sldId id="293" r:id="rId19"/>
+    <p:sldId id="285" r:id="rId20"/>
   </p:sldIdLst>
   <p:sldSz cx="12188825" cy="6858000"/>
   <p:notesSz cx="6858000" cy="9144000"/>
@@ -271,7 +272,7 @@
           <a:p>
             <a:fld id="{0DCA0844-C266-46EC-A036-E1634F64C44A}" type="datetimeFigureOut">
               <a:rPr lang="es-AR"/>
-              <a:t>15/6/2026</a:t>
+              <a:t>18/6/2026</a:t>
             </a:fld>
             <a:endParaRPr/>
           </a:p>
@@ -436,7 +437,7 @@
           <a:p>
             <a:fld id="{28C08BCD-7B2F-4BCE-87AF-5D67EFFE4D17}" type="datetimeFigureOut">
               <a:rPr lang="es-AR"/>
-              <a:t>15/6/2026</a:t>
+              <a:t>18/6/2026</a:t>
             </a:fld>
             <a:endParaRPr/>
           </a:p>
@@ -1098,7 +1099,7 @@
             <a:fld id="{8E36636D-D922-432D-A958-524484B5923D}" type="datetimeFigureOut">
               <a:rPr lang="es-AR"/>
               <a:pPr/>
-              <a:t>15/6/2026</a:t>
+              <a:t>18/6/2026</a:t>
             </a:fld>
             <a:endParaRPr/>
           </a:p>
@@ -1474,7 +1475,7 @@
             <a:fld id="{749F4917-CE56-4645-8050-1555FA0B180B}" type="datetimeFigureOut">
               <a:rPr lang="es-AR"/>
               <a:pPr/>
-              <a:t>15/6/2026</a:t>
+              <a:t>18/6/2026</a:t>
             </a:fld>
             <a:endParaRPr/>
           </a:p>
@@ -1797,7 +1798,7 @@
             <a:fld id="{8E36636D-D922-432D-A958-524484B5923D}" type="datetimeFigureOut">
               <a:rPr lang="es-AR"/>
               <a:pPr/>
-              <a:t>15/6/2026</a:t>
+              <a:t>18/6/2026</a:t>
             </a:fld>
             <a:endParaRPr/>
           </a:p>
@@ -1958,7 +1959,7 @@
             <a:fld id="{8E36636D-D922-432D-A958-524484B5923D}" type="datetimeFigureOut">
               <a:rPr lang="es-AR"/>
               <a:pPr/>
-              <a:t>15/6/2026</a:t>
+              <a:t>18/6/2026</a:t>
             </a:fld>
             <a:endParaRPr/>
           </a:p>
@@ -2181,7 +2182,7 @@
             <a:fld id="{8E36636D-D922-432D-A958-524484B5923D}" type="datetimeFigureOut">
               <a:rPr lang="es-AR"/>
               <a:pPr/>
-              <a:t>15/6/2026</a:t>
+              <a:t>18/6/2026</a:t>
             </a:fld>
             <a:endParaRPr/>
           </a:p>
@@ -2603,7 +2604,7 @@
             <a:fld id="{8E36636D-D922-432D-A958-524484B5923D}" type="datetimeFigureOut">
               <a:rPr lang="es-AR"/>
               <a:pPr/>
-              <a:t>15/6/2026</a:t>
+              <a:t>18/6/2026</a:t>
             </a:fld>
             <a:endParaRPr/>
           </a:p>
@@ -3106,7 +3107,7 @@
             <a:fld id="{8E36636D-D922-432D-A958-524484B5923D}" type="datetimeFigureOut">
               <a:rPr lang="es-AR"/>
               <a:pPr/>
-              <a:t>15/6/2026</a:t>
+              <a:t>18/6/2026</a:t>
             </a:fld>
             <a:endParaRPr/>
           </a:p>
@@ -3407,7 +3408,7 @@
             <a:fld id="{8E36636D-D922-432D-A958-524484B5923D}" type="datetimeFigureOut">
               <a:rPr lang="es-AR"/>
               <a:pPr/>
-              <a:t>15/6/2026</a:t>
+              <a:t>18/6/2026</a:t>
             </a:fld>
             <a:endParaRPr/>
           </a:p>
@@ -3848,7 +3849,7 @@
             <a:fld id="{8E36636D-D922-432D-A958-524484B5923D}" type="datetimeFigureOut">
               <a:rPr lang="es-AR"/>
               <a:pPr/>
-              <a:t>15/6/2026</a:t>
+              <a:t>18/6/2026</a:t>
             </a:fld>
             <a:endParaRPr/>
           </a:p>
@@ -3975,7 +3976,7 @@
             <a:fld id="{8E36636D-D922-432D-A958-524484B5923D}" type="datetimeFigureOut">
               <a:rPr lang="es-AR"/>
               <a:pPr/>
-              <a:t>15/6/2026</a:t>
+              <a:t>18/6/2026</a:t>
             </a:fld>
             <a:endParaRPr/>
           </a:p>
@@ -4079,7 +4080,7 @@
             <a:fld id="{8E36636D-D922-432D-A958-524484B5923D}" type="datetimeFigureOut">
               <a:rPr lang="es-AR"/>
               <a:pPr/>
-              <a:t>15/6/2026</a:t>
+              <a:t>18/6/2026</a:t>
             </a:fld>
             <a:endParaRPr/>
           </a:p>
@@ -4498,7 +4499,7 @@
             <a:fld id="{8E36636D-D922-432D-A958-524484B5923D}" type="datetimeFigureOut">
               <a:rPr lang="es-AR"/>
               <a:pPr/>
-              <a:t>15/6/2026</a:t>
+              <a:t>18/6/2026</a:t>
             </a:fld>
             <a:endParaRPr/>
           </a:p>
@@ -5000,7 +5001,7 @@
             <a:fld id="{8E36636D-D922-432D-A958-524484B5923D}" type="datetimeFigureOut">
               <a:rPr lang="es-AR"/>
               <a:pPr/>
-              <a:t>15/6/2026</a:t>
+              <a:t>18/6/2026</a:t>
             </a:fld>
             <a:endParaRPr/>
           </a:p>
@@ -6394,10 +6395,10 @@
         </p:nvGrpSpPr>
         <p:grpSpPr>
           <a:xfrm>
-            <a:off x="4331512" y="2552204"/>
-            <a:ext cx="3665269" cy="1325190"/>
-            <a:chOff x="4256243" y="2624211"/>
-            <a:chExt cx="3665269" cy="1325190"/>
+            <a:off x="4331512" y="2597481"/>
+            <a:ext cx="3666970" cy="1277819"/>
+            <a:chOff x="4256243" y="2669488"/>
+            <a:chExt cx="3666970" cy="1277819"/>
           </a:xfrm>
         </p:grpSpPr>
         <p:sp>
@@ -6416,7 +6417,7 @@
           </p:nvSpPr>
           <p:spPr>
             <a:xfrm>
-              <a:off x="4256243" y="2624211"/>
+              <a:off x="4256243" y="2669488"/>
               <a:ext cx="2808312" cy="300766"/>
             </a:xfrm>
             <a:prstGeom prst="rect">
@@ -6545,7 +6546,7 @@
           </p:nvSpPr>
           <p:spPr>
             <a:xfrm>
-              <a:off x="4268179" y="3010848"/>
+              <a:off x="4264514" y="2983468"/>
               <a:ext cx="3169983" cy="300766"/>
             </a:xfrm>
             <a:prstGeom prst="rect">
@@ -6674,7 +6675,7 @@
           </p:nvSpPr>
           <p:spPr>
             <a:xfrm>
-              <a:off x="4256243" y="3259721"/>
+              <a:off x="4257944" y="3269117"/>
               <a:ext cx="3665269" cy="392541"/>
             </a:xfrm>
             <a:prstGeom prst="rect">
@@ -6803,7 +6804,7 @@
           </p:nvSpPr>
           <p:spPr>
             <a:xfrm>
-              <a:off x="4256823" y="3645057"/>
+              <a:off x="4264514" y="3642963"/>
               <a:ext cx="3654198" cy="304344"/>
             </a:xfrm>
             <a:prstGeom prst="rect">
@@ -10841,7 +10842,7 @@
           <p:nvPr>
             <p:extLst>
               <p:ext uri="{D42A27DB-BD31-4B8C-83A1-F6EECF244321}">
-                <p14:modId xmlns:p14="http://schemas.microsoft.com/office/powerpoint/2010/main" val="2631599329"/>
+                <p14:modId xmlns:p14="http://schemas.microsoft.com/office/powerpoint/2010/main" val="2018521533"/>
               </p:ext>
             </p:extLst>
           </p:nvPr>
@@ -10912,7 +10913,7 @@
                           <a:latin typeface="Roboto" panose="02000000000000000000" pitchFamily="2" charset="0"/>
                           <a:ea typeface="Roboto" panose="02000000000000000000" pitchFamily="2" charset="0"/>
                         </a:rPr>
-                        <a:t>AWS S3 + AES-256</a:t>
+                        <a:t>AWS + AES-256</a:t>
                       </a:r>
                       <a:endParaRPr lang="es-AR" dirty="0">
                         <a:latin typeface="Roboto" panose="02000000000000000000" pitchFamily="2" charset="0"/>
@@ -15644,7 +15645,295 @@
 </file>
 
 <file path=ppt/slides/slide15.xml><?xml version="1.0" encoding="utf-8"?>
-<p:sld xmlns:a="http://schemas.openxmlformats.org/drawingml/2006/main" xmlns:r="http://schemas.openxmlformats.org/officeDocument/2006/relationships" xmlns:p="http://schemas.openxmlformats.org/presentationml/2006/main">
+<p:sld xmlns:a="http://schemas.openxmlformats.org/drawingml/2006/main" xmlns:r="http://schemas.openxmlformats.org/officeDocument/2006/relationships" xmlns:p="http://schemas.openxmlformats.org/presentationml/2006/main" show="0">
+  <p:cSld>
+    <p:spTree>
+      <p:nvGrpSpPr>
+        <p:cNvPr id="1" name=""/>
+        <p:cNvGrpSpPr/>
+        <p:nvPr/>
+      </p:nvGrpSpPr>
+      <p:grpSpPr>
+        <a:xfrm>
+          <a:off x="0" y="0"/>
+          <a:ext cx="0" cy="0"/>
+          <a:chOff x="0" y="0"/>
+          <a:chExt cx="0" cy="0"/>
+        </a:xfrm>
+      </p:grpSpPr>
+      <p:sp>
+        <p:nvSpPr>
+          <p:cNvPr id="3" name="Título 1">
+            <a:extLst>
+              <a:ext uri="{FF2B5EF4-FFF2-40B4-BE49-F238E27FC236}">
+                <a16:creationId xmlns:a16="http://schemas.microsoft.com/office/drawing/2014/main" id="{CCC0541C-A2E0-4D1B-A96C-E9A3F60991DD}"/>
+              </a:ext>
+            </a:extLst>
+          </p:cNvPr>
+          <p:cNvSpPr txBox="1">
+            <a:spLocks/>
+          </p:cNvSpPr>
+          <p:nvPr/>
+        </p:nvSpPr>
+        <p:spPr>
+          <a:xfrm>
+            <a:off x="693812" y="404664"/>
+            <a:ext cx="9505056" cy="648072"/>
+          </a:xfrm>
+          <a:prstGeom prst="rect">
+            <a:avLst/>
+          </a:prstGeom>
+          <a:effectLst/>
+        </p:spPr>
+        <p:txBody>
+          <a:bodyPr vert="horz" lIns="91440" tIns="45720" rIns="91440" bIns="45720" rtlCol="0" anchor="ctr">
+            <a:normAutofit/>
+          </a:bodyPr>
+          <a:lstStyle>
+            <a:lvl1pPr algn="l" defTabSz="914400" rtl="0" eaLnBrk="1" latinLnBrk="0" hangingPunct="1">
+              <a:lnSpc>
+                <a:spcPct val="90000"/>
+              </a:lnSpc>
+              <a:spcBef>
+                <a:spcPct val="0"/>
+              </a:spcBef>
+              <a:buNone/>
+              <a:defRPr sz="4000" b="0" kern="1200">
+                <a:solidFill>
+                  <a:schemeClr val="tx1"/>
+                </a:solidFill>
+                <a:latin typeface="+mj-lt"/>
+                <a:ea typeface="+mj-ea"/>
+                <a:cs typeface="+mj-cs"/>
+              </a:defRPr>
+            </a:lvl1pPr>
+            <a:lvl2pPr eaLnBrk="1" hangingPunct="1">
+              <a:defRPr>
+                <a:solidFill>
+                  <a:schemeClr val="tx2"/>
+                </a:solidFill>
+              </a:defRPr>
+            </a:lvl2pPr>
+            <a:lvl3pPr eaLnBrk="1" hangingPunct="1">
+              <a:defRPr>
+                <a:solidFill>
+                  <a:schemeClr val="tx2"/>
+                </a:solidFill>
+              </a:defRPr>
+            </a:lvl3pPr>
+            <a:lvl4pPr eaLnBrk="1" hangingPunct="1">
+              <a:defRPr>
+                <a:solidFill>
+                  <a:schemeClr val="tx2"/>
+                </a:solidFill>
+              </a:defRPr>
+            </a:lvl4pPr>
+            <a:lvl5pPr eaLnBrk="1" hangingPunct="1">
+              <a:defRPr>
+                <a:solidFill>
+                  <a:schemeClr val="tx2"/>
+                </a:solidFill>
+              </a:defRPr>
+            </a:lvl5pPr>
+            <a:lvl6pPr eaLnBrk="1" hangingPunct="1">
+              <a:defRPr>
+                <a:solidFill>
+                  <a:schemeClr val="tx2"/>
+                </a:solidFill>
+              </a:defRPr>
+            </a:lvl6pPr>
+            <a:lvl7pPr eaLnBrk="1" hangingPunct="1">
+              <a:defRPr>
+                <a:solidFill>
+                  <a:schemeClr val="tx2"/>
+                </a:solidFill>
+              </a:defRPr>
+            </a:lvl7pPr>
+            <a:lvl8pPr eaLnBrk="1" hangingPunct="1">
+              <a:defRPr>
+                <a:solidFill>
+                  <a:schemeClr val="tx2"/>
+                </a:solidFill>
+              </a:defRPr>
+            </a:lvl8pPr>
+            <a:lvl9pPr eaLnBrk="1" hangingPunct="1">
+              <a:defRPr>
+                <a:solidFill>
+                  <a:schemeClr val="tx2"/>
+                </a:solidFill>
+              </a:defRPr>
+            </a:lvl9pPr>
+          </a:lstStyle>
+          <a:p>
+            <a:pPr>
+              <a:lnSpc>
+                <a:spcPct val="80000"/>
+              </a:lnSpc>
+              <a:spcBef>
+                <a:spcPts val="0"/>
+              </a:spcBef>
+            </a:pPr>
+            <a:r>
+              <a:rPr lang="es-ES" sz="3200" b="1" noProof="1">
+                <a:solidFill>
+                  <a:schemeClr val="tx1">
+                    <a:lumMod val="75000"/>
+                  </a:schemeClr>
+                </a:solidFill>
+                <a:latin typeface="Roboto" panose="02000000000000000000" pitchFamily="2" charset="0"/>
+                <a:ea typeface="Roboto" panose="02000000000000000000" pitchFamily="2" charset="0"/>
+              </a:rPr>
+              <a:t>Diagrama de Entidad - Relación</a:t>
+            </a:r>
+          </a:p>
+        </p:txBody>
+      </p:sp>
+      <p:sp>
+        <p:nvSpPr>
+          <p:cNvPr id="4" name="Rectángulo 3">
+            <a:extLst>
+              <a:ext uri="{FF2B5EF4-FFF2-40B4-BE49-F238E27FC236}">
+                <a16:creationId xmlns:a16="http://schemas.microsoft.com/office/drawing/2014/main" id="{91E9C089-0D98-4C53-8D8D-4EB63E0FE460}"/>
+              </a:ext>
+            </a:extLst>
+          </p:cNvPr>
+          <p:cNvSpPr/>
+          <p:nvPr/>
+        </p:nvSpPr>
+        <p:spPr>
+          <a:xfrm>
+            <a:off x="477788" y="436712"/>
+            <a:ext cx="144016" cy="432048"/>
+          </a:xfrm>
+          <a:prstGeom prst="rect">
+            <a:avLst/>
+          </a:prstGeom>
+          <a:solidFill>
+            <a:schemeClr val="tx1">
+              <a:lumMod val="75000"/>
+            </a:schemeClr>
+          </a:solidFill>
+          <a:ln>
+            <a:solidFill>
+              <a:schemeClr val="tx1">
+                <a:lumMod val="75000"/>
+              </a:schemeClr>
+            </a:solidFill>
+            <a:miter lim="800000"/>
+          </a:ln>
+        </p:spPr>
+        <p:style>
+          <a:lnRef idx="2">
+            <a:schemeClr val="accent1">
+              <a:shade val="50000"/>
+            </a:schemeClr>
+          </a:lnRef>
+          <a:fillRef idx="1">
+            <a:schemeClr val="accent1"/>
+          </a:fillRef>
+          <a:effectRef idx="0">
+            <a:schemeClr val="accent1"/>
+          </a:effectRef>
+          <a:fontRef idx="minor">
+            <a:schemeClr val="lt1"/>
+          </a:fontRef>
+        </p:style>
+        <p:txBody>
+          <a:bodyPr rtlCol="0" anchor="ctr"/>
+          <a:lstStyle/>
+          <a:p>
+            <a:pPr algn="ctr"/>
+            <a:endParaRPr lang="es-AR" sz="2400"/>
+          </a:p>
+        </p:txBody>
+      </p:sp>
+      <p:pic>
+        <p:nvPicPr>
+          <p:cNvPr id="6" name="Imagen 5">
+            <a:extLst>
+              <a:ext uri="{FF2B5EF4-FFF2-40B4-BE49-F238E27FC236}">
+                <a16:creationId xmlns:a16="http://schemas.microsoft.com/office/drawing/2014/main" id="{989DD2E8-1D12-4754-A2D7-05605B6973EB}"/>
+              </a:ext>
+            </a:extLst>
+          </p:cNvPr>
+          <p:cNvPicPr>
+            <a:picLocks noChangeAspect="1"/>
+          </p:cNvPicPr>
+          <p:nvPr/>
+        </p:nvPicPr>
+        <p:blipFill>
+          <a:blip r:embed="rId2"/>
+          <a:stretch>
+            <a:fillRect/>
+          </a:stretch>
+        </p:blipFill>
+        <p:spPr>
+          <a:xfrm>
+            <a:off x="0" y="1052735"/>
+            <a:ext cx="12188825" cy="112387"/>
+          </a:xfrm>
+          <a:prstGeom prst="rect">
+            <a:avLst/>
+          </a:prstGeom>
+        </p:spPr>
+      </p:pic>
+      <p:pic>
+        <p:nvPicPr>
+          <p:cNvPr id="5" name="Imagen 4">
+            <a:extLst>
+              <a:ext uri="{FF2B5EF4-FFF2-40B4-BE49-F238E27FC236}">
+                <a16:creationId xmlns:a16="http://schemas.microsoft.com/office/drawing/2014/main" id="{EFF29E85-0FDF-AE4C-AD54-CDF1A53387A8}"/>
+              </a:ext>
+            </a:extLst>
+          </p:cNvPr>
+          <p:cNvPicPr>
+            <a:picLocks noChangeAspect="1"/>
+          </p:cNvPicPr>
+          <p:nvPr/>
+        </p:nvPicPr>
+        <p:blipFill>
+          <a:blip r:embed="rId3"/>
+          <a:stretch>
+            <a:fillRect/>
+          </a:stretch>
+        </p:blipFill>
+        <p:spPr>
+          <a:xfrm>
+            <a:off x="3477675" y="1229612"/>
+            <a:ext cx="5233473" cy="5479341"/>
+          </a:xfrm>
+          <a:prstGeom prst="rect">
+            <a:avLst/>
+          </a:prstGeom>
+        </p:spPr>
+      </p:pic>
+    </p:spTree>
+    <p:extLst>
+      <p:ext uri="{BB962C8B-B14F-4D97-AF65-F5344CB8AC3E}">
+        <p14:creationId xmlns:p14="http://schemas.microsoft.com/office/powerpoint/2010/main" val="594040101"/>
+      </p:ext>
+    </p:extLst>
+  </p:cSld>
+  <p:clrMapOvr>
+    <a:masterClrMapping/>
+  </p:clrMapOvr>
+  <mc:AlternateContent xmlns:mc="http://schemas.openxmlformats.org/markup-compatibility/2006">
+    <mc:Choice xmlns:p159="http://schemas.microsoft.com/office/powerpoint/2015/09/main" Requires="p159">
+      <p:transition xmlns:p14="http://schemas.microsoft.com/office/powerpoint/2010/main" spd="slow" p14:dur="2000">
+        <p159:morph option="byObject"/>
+      </p:transition>
+    </mc:Choice>
+    <mc:Fallback>
+      <p:transition spd="slow">
+        <p:fade/>
+      </p:transition>
+    </mc:Fallback>
+  </mc:AlternateContent>
+</p:sld>
+</file>
+
+<file path=ppt/slides/slide16.xml><?xml version="1.0" encoding="utf-8"?>
+<p:sld xmlns:a="http://schemas.openxmlformats.org/drawingml/2006/main" xmlns:r="http://schemas.openxmlformats.org/officeDocument/2006/relationships" xmlns:p="http://schemas.openxmlformats.org/presentationml/2006/main" show="0">
   <p:cSld>
     <p:spTree>
       <p:nvGrpSpPr>
@@ -15902,7 +16191,7 @@
         </p:spPr>
         <p:txBody>
           <a:bodyPr vert="horz" lIns="91440" tIns="45720" rIns="91440" bIns="45720" rtlCol="0" anchor="ctr">
-            <a:normAutofit fontScale="92500"/>
+            <a:normAutofit/>
           </a:bodyPr>
           <a:lstStyle>
             <a:lvl1pPr algn="l" defTabSz="914400" rtl="0" eaLnBrk="1" latinLnBrk="0" hangingPunct="1">
@@ -15980,9 +16269,9 @@
             </a:lvl9pPr>
           </a:lstStyle>
           <a:p>
-            <a:pPr algn="just">
+            <a:pPr marL="342900" indent="-342900" algn="just">
               <a:lnSpc>
-                <a:spcPct val="80000"/>
+                <a:spcPct val="150000"/>
               </a:lnSpc>
               <a:spcBef>
                 <a:spcPts val="50"/>
@@ -15990,9 +16279,11 @@
               <a:spcAft>
                 <a:spcPts val="50"/>
               </a:spcAft>
+              <a:buFont typeface="Wingdings" panose="05000000000000000000" pitchFamily="2" charset="2"/>
+              <a:buChar char="§"/>
             </a:pPr>
             <a:r>
-              <a:rPr lang="es-ES" sz="1900" b="1" noProof="1">
+              <a:rPr lang="es-AR" sz="1900" b="1" noProof="1">
                 <a:solidFill>
                   <a:schemeClr val="accent1">
                     <a:lumMod val="75000"/>
@@ -16001,20 +16292,23 @@
                 <a:latin typeface="Roboto" panose="02000000000000000000" pitchFamily="2" charset="0"/>
                 <a:ea typeface="Roboto" panose="02000000000000000000" pitchFamily="2" charset="0"/>
               </a:rPr>
-              <a:t>Categorización Integral: </a:t>
+              <a:t>Del Proyecto: </a:t>
             </a:r>
             <a:r>
-              <a:rPr lang="es-ES" sz="1900" noProof="1">
+              <a:rPr lang="es-AR" sz="1900" noProof="1">
+                <a:solidFill>
+                  <a:schemeClr val="tx2"/>
+                </a:solidFill>
                 <a:latin typeface="Roboto" panose="02000000000000000000" pitchFamily="2" charset="0"/>
                 <a:ea typeface="Roboto" panose="02000000000000000000" pitchFamily="2" charset="0"/>
               </a:rPr>
-              <a:t>Identificación de riesgos del Proyecto, Técnicos, de Seguridad, Ambientales y de Gestión.</a:t>
+              <a:t>Que nos quedemos sin dinero o que los proveedores (como AWS) se caigan o nos cambien las reglas a mitad de camino y no cumplamos con las entregas. </a:t>
             </a:r>
           </a:p>
           <a:p>
-            <a:pPr algn="just">
+            <a:pPr marL="342900" indent="-342900" algn="just">
               <a:lnSpc>
-                <a:spcPct val="80000"/>
+                <a:spcPct val="150000"/>
               </a:lnSpc>
               <a:spcBef>
                 <a:spcPts val="50"/>
@@ -16022,16 +16316,36 @@
               <a:spcAft>
                 <a:spcPts val="50"/>
               </a:spcAft>
+              <a:buFont typeface="Wingdings" panose="05000000000000000000" pitchFamily="2" charset="2"/>
+              <a:buChar char="§"/>
             </a:pPr>
-            <a:endParaRPr lang="es-ES" sz="1900" noProof="1">
-              <a:latin typeface="Roboto" panose="02000000000000000000" pitchFamily="2" charset="0"/>
-              <a:ea typeface="Roboto" panose="02000000000000000000" pitchFamily="2" charset="0"/>
-            </a:endParaRPr>
+            <a:r>
+              <a:rPr lang="es-AR" sz="1900" b="1" noProof="1">
+                <a:solidFill>
+                  <a:schemeClr val="accent1">
+                    <a:lumMod val="75000"/>
+                  </a:schemeClr>
+                </a:solidFill>
+                <a:latin typeface="Roboto" panose="02000000000000000000" pitchFamily="2" charset="0"/>
+                <a:ea typeface="Roboto" panose="02000000000000000000" pitchFamily="2" charset="0"/>
+              </a:rPr>
+              <a:t>Técnicos: </a:t>
+            </a:r>
+            <a:r>
+              <a:rPr lang="es-AR" sz="1900" noProof="1">
+                <a:solidFill>
+                  <a:schemeClr val="tx2"/>
+                </a:solidFill>
+                <a:latin typeface="Roboto" panose="02000000000000000000" pitchFamily="2" charset="0"/>
+                <a:ea typeface="Roboto" panose="02000000000000000000" pitchFamily="2" charset="0"/>
+              </a:rPr>
+              <a:t>Que la IA no pueda interactuar con la plataforma low-code, que tenga alucinaciones o que las mediciones de CO2 tampoco puedan interactuar con el resto del sistema. </a:t>
+            </a:r>
           </a:p>
           <a:p>
-            <a:pPr algn="just">
+            <a:pPr marL="342900" indent="-342900" algn="just">
               <a:lnSpc>
-                <a:spcPct val="80000"/>
+                <a:spcPct val="150000"/>
               </a:lnSpc>
               <a:spcBef>
                 <a:spcPts val="50"/>
@@ -16039,9 +16353,11 @@
               <a:spcAft>
                 <a:spcPts val="50"/>
               </a:spcAft>
+              <a:buFont typeface="Wingdings" panose="05000000000000000000" pitchFamily="2" charset="2"/>
+              <a:buChar char="§"/>
             </a:pPr>
             <a:r>
-              <a:rPr lang="es-ES" sz="1900" b="1" noProof="1">
+              <a:rPr lang="es-AR" sz="1900" b="1" noProof="1">
                 <a:solidFill>
                   <a:schemeClr val="accent1">
                     <a:lumMod val="75000"/>
@@ -16050,20 +16366,23 @@
                 <a:latin typeface="Roboto" panose="02000000000000000000" pitchFamily="2" charset="0"/>
                 <a:ea typeface="Roboto" panose="02000000000000000000" pitchFamily="2" charset="0"/>
               </a:rPr>
-              <a:t>Análisis de Pareto (80/20): </a:t>
+              <a:t>De Seguridad: </a:t>
             </a:r>
             <a:r>
-              <a:rPr lang="es-ES" sz="1900" noProof="1">
+              <a:rPr lang="es-AR" sz="1900" noProof="1">
+                <a:solidFill>
+                  <a:schemeClr val="tx2"/>
+                </a:solidFill>
                 <a:latin typeface="Roboto" panose="02000000000000000000" pitchFamily="2" charset="0"/>
                 <a:ea typeface="Roboto" panose="02000000000000000000" pitchFamily="2" charset="0"/>
               </a:rPr>
-              <a:t>Identificación de las amenazas críticas.</a:t>
+              <a:t>Que nos hackeen, que se filtren los datos de los clientes o que alguien o algún perfil ingrese donde no debe. </a:t>
             </a:r>
           </a:p>
           <a:p>
-            <a:pPr algn="just">
+            <a:pPr marL="342900" indent="-342900" algn="just">
               <a:lnSpc>
-                <a:spcPct val="80000"/>
+                <a:spcPct val="150000"/>
               </a:lnSpc>
               <a:spcBef>
                 <a:spcPts val="50"/>
@@ -16071,16 +16390,36 @@
               <a:spcAft>
                 <a:spcPts val="50"/>
               </a:spcAft>
+              <a:buFont typeface="Wingdings" panose="05000000000000000000" pitchFamily="2" charset="2"/>
+              <a:buChar char="§"/>
             </a:pPr>
-            <a:endParaRPr lang="es-ES" sz="1900" noProof="1">
-              <a:latin typeface="Roboto" panose="02000000000000000000" pitchFamily="2" charset="0"/>
-              <a:ea typeface="Roboto" panose="02000000000000000000" pitchFamily="2" charset="0"/>
-            </a:endParaRPr>
+            <a:r>
+              <a:rPr lang="es-AR" sz="1900" b="1" noProof="1">
+                <a:solidFill>
+                  <a:schemeClr val="accent1">
+                    <a:lumMod val="75000"/>
+                  </a:schemeClr>
+                </a:solidFill>
+                <a:latin typeface="Roboto" panose="02000000000000000000" pitchFamily="2" charset="0"/>
+                <a:ea typeface="Roboto" panose="02000000000000000000" pitchFamily="2" charset="0"/>
+              </a:rPr>
+              <a:t>Ambientales: </a:t>
+            </a:r>
+            <a:r>
+              <a:rPr lang="es-AR" sz="1900" noProof="1">
+                <a:solidFill>
+                  <a:schemeClr val="tx2"/>
+                </a:solidFill>
+                <a:latin typeface="Roboto" panose="02000000000000000000" pitchFamily="2" charset="0"/>
+                <a:ea typeface="Roboto" panose="02000000000000000000" pitchFamily="2" charset="0"/>
+              </a:rPr>
+              <a:t>Que nuestra propia plataforma gaste más energía de la que ahorra o que las mediciones de CO2 sean incorrectas. </a:t>
+            </a:r>
           </a:p>
           <a:p>
-            <a:pPr marL="719138" indent="-271463" algn="just" defTabSz="541338">
+            <a:pPr marL="342900" indent="-342900" algn="just">
               <a:lnSpc>
-                <a:spcPct val="80000"/>
+                <a:spcPct val="150000"/>
               </a:lnSpc>
               <a:spcBef>
                 <a:spcPts val="50"/>
@@ -16088,10 +16427,11 @@
               <a:spcAft>
                 <a:spcPts val="50"/>
               </a:spcAft>
-              <a:buAutoNum type="arabicPeriod"/>
+              <a:buFont typeface="Wingdings" panose="05000000000000000000" pitchFamily="2" charset="2"/>
+              <a:buChar char="§"/>
             </a:pPr>
             <a:r>
-              <a:rPr lang="es-ES" sz="1900" b="1" noProof="1">
+              <a:rPr lang="es-AR" sz="1900" b="1" noProof="1">
                 <a:solidFill>
                   <a:schemeClr val="accent1">
                     <a:lumMod val="75000"/>
@@ -16100,338 +16440,25 @@
                 <a:latin typeface="Roboto" panose="02000000000000000000" pitchFamily="2" charset="0"/>
                 <a:ea typeface="Roboto" panose="02000000000000000000" pitchFamily="2" charset="0"/>
               </a:rPr>
-              <a:t>RG-05 - Seguridad y Fugas: </a:t>
+              <a:t>De Gestión: </a:t>
             </a:r>
             <a:r>
-              <a:rPr lang="es-ES" sz="1900" noProof="1">
+              <a:rPr lang="es-AR" sz="1900" noProof="1">
+                <a:solidFill>
+                  <a:schemeClr val="tx2"/>
+                </a:solidFill>
                 <a:latin typeface="Roboto" panose="02000000000000000000" pitchFamily="2" charset="0"/>
                 <a:ea typeface="Roboto" panose="02000000000000000000" pitchFamily="2" charset="0"/>
               </a:rPr>
-              <a:t>Riesgo de exposición de datos sensibles y código.</a:t>
+              <a:t>Que los programadores no quieran usar la herramienta porque no les gusta cambiar su forma de trabajar. </a:t>
             </a:r>
-          </a:p>
-          <a:p>
-            <a:pPr marL="719138" indent="-271463" algn="just" defTabSz="541338">
-              <a:lnSpc>
-                <a:spcPct val="80000"/>
-              </a:lnSpc>
-              <a:spcBef>
-                <a:spcPts val="50"/>
-              </a:spcBef>
-              <a:spcAft>
-                <a:spcPts val="50"/>
-              </a:spcAft>
-              <a:buAutoNum type="arabicPeriod"/>
-            </a:pPr>
             <a:endParaRPr lang="es-ES" sz="1900" noProof="1">
+              <a:solidFill>
+                <a:schemeClr val="tx2"/>
+              </a:solidFill>
               <a:latin typeface="Roboto" panose="02000000000000000000" pitchFamily="2" charset="0"/>
               <a:ea typeface="Roboto" panose="02000000000000000000" pitchFamily="2" charset="0"/>
             </a:endParaRPr>
-          </a:p>
-          <a:p>
-            <a:pPr marL="719138" indent="-271463" algn="just" defTabSz="541338">
-              <a:lnSpc>
-                <a:spcPct val="80000"/>
-              </a:lnSpc>
-              <a:spcBef>
-                <a:spcPts val="50"/>
-              </a:spcBef>
-              <a:spcAft>
-                <a:spcPts val="50"/>
-              </a:spcAft>
-              <a:buAutoNum type="arabicPeriod"/>
-            </a:pPr>
-            <a:r>
-              <a:rPr lang="es-ES" sz="1900" b="1" noProof="1">
-                <a:solidFill>
-                  <a:schemeClr val="accent1">
-                    <a:lumMod val="75000"/>
-                  </a:schemeClr>
-                </a:solidFill>
-                <a:latin typeface="Roboto" panose="02000000000000000000" pitchFamily="2" charset="0"/>
-                <a:ea typeface="Roboto" panose="02000000000000000000" pitchFamily="2" charset="0"/>
-              </a:rPr>
-              <a:t>RG-03 - Integración IA/Low-Code: </a:t>
-            </a:r>
-            <a:r>
-              <a:rPr lang="es-ES" sz="1900" noProof="1">
-                <a:latin typeface="Roboto" panose="02000000000000000000" pitchFamily="2" charset="0"/>
-                <a:ea typeface="Roboto" panose="02000000000000000000" pitchFamily="2" charset="0"/>
-              </a:rPr>
-              <a:t>Fallas de interoperabilidad entre modelos generativos y la plataforma.</a:t>
-            </a:r>
-          </a:p>
-          <a:p>
-            <a:pPr marL="719138" indent="-271463" algn="just" defTabSz="541338">
-              <a:lnSpc>
-                <a:spcPct val="80000"/>
-              </a:lnSpc>
-              <a:spcBef>
-                <a:spcPts val="50"/>
-              </a:spcBef>
-              <a:spcAft>
-                <a:spcPts val="50"/>
-              </a:spcAft>
-              <a:buAutoNum type="arabicPeriod"/>
-            </a:pPr>
-            <a:endParaRPr lang="es-ES" sz="1900" noProof="1">
-              <a:latin typeface="Roboto" panose="02000000000000000000" pitchFamily="2" charset="0"/>
-              <a:ea typeface="Roboto" panose="02000000000000000000" pitchFamily="2" charset="0"/>
-            </a:endParaRPr>
-          </a:p>
-          <a:p>
-            <a:pPr marL="719138" indent="-271463" algn="just" defTabSz="541338">
-              <a:lnSpc>
-                <a:spcPct val="80000"/>
-              </a:lnSpc>
-              <a:spcBef>
-                <a:spcPts val="50"/>
-              </a:spcBef>
-              <a:spcAft>
-                <a:spcPts val="50"/>
-              </a:spcAft>
-              <a:buAutoNum type="arabicPeriod"/>
-            </a:pPr>
-            <a:r>
-              <a:rPr lang="es-ES" sz="1900" b="1" noProof="1">
-                <a:solidFill>
-                  <a:schemeClr val="accent1">
-                    <a:lumMod val="75000"/>
-                  </a:schemeClr>
-                </a:solidFill>
-                <a:latin typeface="Roboto" panose="02000000000000000000" pitchFamily="2" charset="0"/>
-                <a:ea typeface="Roboto" panose="02000000000000000000" pitchFamily="2" charset="0"/>
-              </a:rPr>
-              <a:t>RG-01 - Retrasos de Cronograma: </a:t>
-            </a:r>
-            <a:r>
-              <a:rPr lang="es-ES" sz="1900" noProof="1">
-                <a:latin typeface="Roboto" panose="02000000000000000000" pitchFamily="2" charset="0"/>
-                <a:ea typeface="Roboto" panose="02000000000000000000" pitchFamily="2" charset="0"/>
-              </a:rPr>
-              <a:t>Impacto por caída o cambios en servicios de proveedores cloud.</a:t>
-            </a:r>
-          </a:p>
-          <a:p>
-            <a:pPr marL="447675" algn="just" defTabSz="541338">
-              <a:lnSpc>
-                <a:spcPct val="80000"/>
-              </a:lnSpc>
-              <a:spcBef>
-                <a:spcPts val="50"/>
-              </a:spcBef>
-              <a:spcAft>
-                <a:spcPts val="50"/>
-              </a:spcAft>
-            </a:pPr>
-            <a:endParaRPr lang="es-ES" sz="1900" noProof="1">
-              <a:latin typeface="Roboto" panose="02000000000000000000" pitchFamily="2" charset="0"/>
-              <a:ea typeface="Roboto" panose="02000000000000000000" pitchFamily="2" charset="0"/>
-            </a:endParaRPr>
-          </a:p>
-          <a:p>
-            <a:pPr algn="just" defTabSz="541338">
-              <a:lnSpc>
-                <a:spcPct val="80000"/>
-              </a:lnSpc>
-              <a:spcBef>
-                <a:spcPts val="50"/>
-              </a:spcBef>
-              <a:spcAft>
-                <a:spcPts val="50"/>
-              </a:spcAft>
-            </a:pPr>
-            <a:r>
-              <a:rPr lang="es-ES" sz="1900" b="1" noProof="1">
-                <a:solidFill>
-                  <a:schemeClr val="accent1">
-                    <a:lumMod val="75000"/>
-                  </a:schemeClr>
-                </a:solidFill>
-                <a:latin typeface="Roboto" panose="02000000000000000000" pitchFamily="2" charset="0"/>
-                <a:ea typeface="Roboto" panose="02000000000000000000" pitchFamily="2" charset="0"/>
-              </a:rPr>
-              <a:t>Plan de Contingencia: </a:t>
-            </a:r>
-          </a:p>
-          <a:p>
-            <a:pPr algn="just" defTabSz="541338">
-              <a:lnSpc>
-                <a:spcPct val="80000"/>
-              </a:lnSpc>
-              <a:spcBef>
-                <a:spcPts val="50"/>
-              </a:spcBef>
-              <a:spcAft>
-                <a:spcPts val="50"/>
-              </a:spcAft>
-            </a:pPr>
-            <a:r>
-              <a:rPr lang="es-ES" sz="1900" b="1" noProof="1">
-                <a:solidFill>
-                  <a:schemeClr val="accent1">
-                    <a:lumMod val="75000"/>
-                  </a:schemeClr>
-                </a:solidFill>
-                <a:latin typeface="Roboto" panose="02000000000000000000" pitchFamily="2" charset="0"/>
-                <a:ea typeface="Roboto" panose="02000000000000000000" pitchFamily="2" charset="0"/>
-              </a:rPr>
-              <a:t>Contra Fugas: </a:t>
-            </a:r>
-            <a:r>
-              <a:rPr lang="es-ES" sz="1900" noProof="1">
-                <a:latin typeface="Roboto" panose="02000000000000000000" pitchFamily="2" charset="0"/>
-                <a:ea typeface="Roboto" panose="02000000000000000000" pitchFamily="2" charset="0"/>
-              </a:rPr>
-              <a:t>Auditorías continuas y encriptación de punta a punta. </a:t>
-            </a:r>
-          </a:p>
-          <a:p>
-            <a:pPr algn="just" defTabSz="541338">
-              <a:lnSpc>
-                <a:spcPct val="80000"/>
-              </a:lnSpc>
-              <a:spcBef>
-                <a:spcPts val="50"/>
-              </a:spcBef>
-              <a:spcAft>
-                <a:spcPts val="50"/>
-              </a:spcAft>
-            </a:pPr>
-            <a:endParaRPr lang="es-ES" sz="1900" noProof="1">
-              <a:latin typeface="Roboto" panose="02000000000000000000" pitchFamily="2" charset="0"/>
-              <a:ea typeface="Roboto" panose="02000000000000000000" pitchFamily="2" charset="0"/>
-            </a:endParaRPr>
-          </a:p>
-          <a:p>
-            <a:pPr algn="just" defTabSz="541338">
-              <a:lnSpc>
-                <a:spcPct val="80000"/>
-              </a:lnSpc>
-              <a:spcBef>
-                <a:spcPts val="50"/>
-              </a:spcBef>
-              <a:spcAft>
-                <a:spcPts val="50"/>
-              </a:spcAft>
-            </a:pPr>
-            <a:r>
-              <a:rPr lang="es-ES" sz="1900" b="1" noProof="1">
-                <a:solidFill>
-                  <a:schemeClr val="accent1">
-                    <a:lumMod val="75000"/>
-                  </a:schemeClr>
-                </a:solidFill>
-                <a:latin typeface="Roboto" panose="02000000000000000000" pitchFamily="2" charset="0"/>
-                <a:ea typeface="Roboto" panose="02000000000000000000" pitchFamily="2" charset="0"/>
-              </a:rPr>
-              <a:t>Contra Fallos Técnicos: </a:t>
-            </a:r>
-            <a:r>
-              <a:rPr lang="es-ES" sz="1900" noProof="1">
-                <a:latin typeface="Roboto" panose="02000000000000000000" pitchFamily="2" charset="0"/>
-                <a:ea typeface="Roboto" panose="02000000000000000000" pitchFamily="2" charset="0"/>
-              </a:rPr>
-              <a:t>Pruebas iterativas en cada Sprint (metodología SCRUM) evitando validaciones tardías. </a:t>
-            </a:r>
-          </a:p>
-          <a:p>
-            <a:pPr algn="just" defTabSz="541338">
-              <a:lnSpc>
-                <a:spcPct val="80000"/>
-              </a:lnSpc>
-              <a:spcBef>
-                <a:spcPts val="50"/>
-              </a:spcBef>
-              <a:spcAft>
-                <a:spcPts val="50"/>
-              </a:spcAft>
-            </a:pPr>
-            <a:endParaRPr lang="es-ES" sz="1900" noProof="1">
-              <a:latin typeface="Roboto" panose="02000000000000000000" pitchFamily="2" charset="0"/>
-              <a:ea typeface="Roboto" panose="02000000000000000000" pitchFamily="2" charset="0"/>
-            </a:endParaRPr>
-          </a:p>
-          <a:p>
-            <a:pPr algn="just" defTabSz="541338">
-              <a:lnSpc>
-                <a:spcPct val="80000"/>
-              </a:lnSpc>
-              <a:spcBef>
-                <a:spcPts val="50"/>
-              </a:spcBef>
-              <a:spcAft>
-                <a:spcPts val="50"/>
-              </a:spcAft>
-            </a:pPr>
-            <a:r>
-              <a:rPr lang="es-ES" sz="1900" b="1" noProof="1">
-                <a:solidFill>
-                  <a:schemeClr val="accent1">
-                    <a:lumMod val="75000"/>
-                  </a:schemeClr>
-                </a:solidFill>
-                <a:latin typeface="Roboto" panose="02000000000000000000" pitchFamily="2" charset="0"/>
-                <a:ea typeface="Roboto" panose="02000000000000000000" pitchFamily="2" charset="0"/>
-              </a:rPr>
-              <a:t>Contra Retrasos:</a:t>
-            </a:r>
-            <a:r>
-              <a:rPr lang="es-ES" sz="1900" noProof="1">
-                <a:latin typeface="Roboto" panose="02000000000000000000" pitchFamily="2" charset="0"/>
-                <a:ea typeface="Roboto" panose="02000000000000000000" pitchFamily="2" charset="0"/>
-              </a:rPr>
-              <a:t> Implementación de buffers temporales en el calendario. </a:t>
-            </a:r>
-          </a:p>
-          <a:p>
-            <a:pPr algn="just" defTabSz="541338">
-              <a:lnSpc>
-                <a:spcPct val="80000"/>
-              </a:lnSpc>
-              <a:spcBef>
-                <a:spcPts val="50"/>
-              </a:spcBef>
-              <a:spcAft>
-                <a:spcPts val="50"/>
-              </a:spcAft>
-            </a:pPr>
-            <a:endParaRPr lang="es-ES" sz="1900" noProof="1">
-              <a:latin typeface="Roboto" panose="02000000000000000000" pitchFamily="2" charset="0"/>
-              <a:ea typeface="Roboto" panose="02000000000000000000" pitchFamily="2" charset="0"/>
-            </a:endParaRPr>
-          </a:p>
-          <a:p>
-            <a:pPr algn="just" defTabSz="541338">
-              <a:lnSpc>
-                <a:spcPct val="80000"/>
-              </a:lnSpc>
-              <a:spcBef>
-                <a:spcPts val="50"/>
-              </a:spcBef>
-              <a:spcAft>
-                <a:spcPts val="50"/>
-              </a:spcAft>
-            </a:pPr>
-            <a:r>
-              <a:rPr lang="es-ES" sz="1900" b="1" noProof="1">
-                <a:solidFill>
-                  <a:schemeClr val="accent1">
-                    <a:lumMod val="75000"/>
-                  </a:schemeClr>
-                </a:solidFill>
-                <a:latin typeface="Roboto" panose="02000000000000000000" pitchFamily="2" charset="0"/>
-                <a:ea typeface="Roboto" panose="02000000000000000000" pitchFamily="2" charset="0"/>
-              </a:rPr>
-              <a:t>Contra Dependencia Cloud: </a:t>
-            </a:r>
-            <a:r>
-              <a:rPr lang="es-ES" sz="1900" noProof="1">
-                <a:latin typeface="Roboto" panose="02000000000000000000" pitchFamily="2" charset="0"/>
-                <a:ea typeface="Roboto" panose="02000000000000000000" pitchFamily="2" charset="0"/>
-              </a:rPr>
-              <a:t>Arquitectura agnóstica preparada para migración (AWS a Google Cloud).</a:t>
-            </a:r>
           </a:p>
         </p:txBody>
       </p:sp>
@@ -16445,13 +16472,13 @@
   <p:clrMapOvr>
     <a:masterClrMapping/>
   </p:clrMapOvr>
-  <mc:AlternateContent xmlns:mc="http://schemas.openxmlformats.org/markup-compatibility/2006" xmlns:p159="http://schemas.microsoft.com/office/powerpoint/2015/09/main">
-    <mc:Choice Requires="p159">
+  <mc:AlternateContent xmlns:mc="http://schemas.openxmlformats.org/markup-compatibility/2006">
+    <mc:Choice xmlns:p159="http://schemas.microsoft.com/office/powerpoint/2015/09/main" Requires="p159">
       <p:transition xmlns:p14="http://schemas.microsoft.com/office/powerpoint/2010/main" spd="slow" p14:dur="2000">
         <p159:morph option="byObject"/>
       </p:transition>
     </mc:Choice>
-    <mc:Fallback xmlns="">
+    <mc:Fallback>
       <p:transition spd="slow">
         <p:fade/>
       </p:transition>
@@ -27214,6 +27241,134 @@
 </file>
 
 <file path=customXml/item1.xml><?xml version="1.0" encoding="utf-8"?>
+<p:properties xmlns:p="http://schemas.microsoft.com/office/2006/metadata/properties" xmlns:xsi="http://www.w3.org/2001/XMLSchema-instance" xmlns:pc="http://schemas.microsoft.com/office/infopath/2007/PartnerControls">
+  <documentManagement>
+    <DirectSourceMarket xmlns="2958f784-0ef9-4616-b22d-512a8cad1f0d">english</DirectSourceMarket>
+    <ApprovalStatus xmlns="2958f784-0ef9-4616-b22d-512a8cad1f0d">InProgress</ApprovalStatus>
+    <MarketSpecific xmlns="2958f784-0ef9-4616-b22d-512a8cad1f0d">false</MarketSpecific>
+    <LocComments xmlns="2958f784-0ef9-4616-b22d-512a8cad1f0d" xsi:nil="true"/>
+    <ThumbnailAssetId xmlns="2958f784-0ef9-4616-b22d-512a8cad1f0d" xsi:nil="true"/>
+    <PrimaryImageGen xmlns="2958f784-0ef9-4616-b22d-512a8cad1f0d">false</PrimaryImageGen>
+    <LegacyData xmlns="2958f784-0ef9-4616-b22d-512a8cad1f0d" xsi:nil="true"/>
+    <LocRecommendedHandoff xmlns="2958f784-0ef9-4616-b22d-512a8cad1f0d" xsi:nil="true"/>
+    <BusinessGroup xmlns="2958f784-0ef9-4616-b22d-512a8cad1f0d" xsi:nil="true"/>
+    <BlockPublish xmlns="2958f784-0ef9-4616-b22d-512a8cad1f0d">false</BlockPublish>
+    <TPFriendlyName xmlns="2958f784-0ef9-4616-b22d-512a8cad1f0d" xsi:nil="true"/>
+    <NumericId xmlns="2958f784-0ef9-4616-b22d-512a8cad1f0d" xsi:nil="true"/>
+    <APEditor xmlns="2958f784-0ef9-4616-b22d-512a8cad1f0d">
+      <UserInfo>
+        <DisplayName/>
+        <AccountId xsi:nil="true"/>
+        <AccountType/>
+      </UserInfo>
+    </APEditor>
+    <SourceTitle xmlns="2958f784-0ef9-4616-b22d-512a8cad1f0d" xsi:nil="true"/>
+    <OpenTemplate xmlns="2958f784-0ef9-4616-b22d-512a8cad1f0d">true</OpenTemplate>
+    <UALocComments xmlns="2958f784-0ef9-4616-b22d-512a8cad1f0d" xsi:nil="true"/>
+    <ParentAssetId xmlns="2958f784-0ef9-4616-b22d-512a8cad1f0d" xsi:nil="true"/>
+    <IntlLangReviewDate xmlns="2958f784-0ef9-4616-b22d-512a8cad1f0d" xsi:nil="true"/>
+    <FeatureTagsTaxHTField0 xmlns="2958f784-0ef9-4616-b22d-512a8cad1f0d">
+      <Terms xmlns="http://schemas.microsoft.com/office/infopath/2007/PartnerControls"/>
+    </FeatureTagsTaxHTField0>
+    <PublishStatusLookup xmlns="2958f784-0ef9-4616-b22d-512a8cad1f0d">
+      <Value>631916</Value>
+    </PublishStatusLookup>
+    <Providers xmlns="2958f784-0ef9-4616-b22d-512a8cad1f0d" xsi:nil="true"/>
+    <MachineTranslated xmlns="2958f784-0ef9-4616-b22d-512a8cad1f0d">false</MachineTranslated>
+    <OriginalSourceMarket xmlns="2958f784-0ef9-4616-b22d-512a8cad1f0d">english</OriginalSourceMarket>
+    <APDescription xmlns="2958f784-0ef9-4616-b22d-512a8cad1f0d" xsi:nil="true"/>
+    <ClipArtFilename xmlns="2958f784-0ef9-4616-b22d-512a8cad1f0d" xsi:nil="true"/>
+    <ContentItem xmlns="2958f784-0ef9-4616-b22d-512a8cad1f0d" xsi:nil="true"/>
+    <TPInstallLocation xmlns="2958f784-0ef9-4616-b22d-512a8cad1f0d" xsi:nil="true"/>
+    <PublishTargets xmlns="2958f784-0ef9-4616-b22d-512a8cad1f0d">OfficeOnlineVNext</PublishTargets>
+    <TimesCloned xmlns="2958f784-0ef9-4616-b22d-512a8cad1f0d" xsi:nil="true"/>
+    <AssetStart xmlns="2958f784-0ef9-4616-b22d-512a8cad1f0d">2011-12-12T13:37:00+00:00</AssetStart>
+    <Provider xmlns="2958f784-0ef9-4616-b22d-512a8cad1f0d" xsi:nil="true"/>
+    <AcquiredFrom xmlns="2958f784-0ef9-4616-b22d-512a8cad1f0d">Internal MS</AcquiredFrom>
+    <FriendlyTitle xmlns="2958f784-0ef9-4616-b22d-512a8cad1f0d" xsi:nil="true"/>
+    <LastHandOff xmlns="2958f784-0ef9-4616-b22d-512a8cad1f0d" xsi:nil="true"/>
+    <TPClientViewer xmlns="2958f784-0ef9-4616-b22d-512a8cad1f0d" xsi:nil="true"/>
+    <ShowIn xmlns="2958f784-0ef9-4616-b22d-512a8cad1f0d">Show everywhere</ShowIn>
+    <UANotes xmlns="2958f784-0ef9-4616-b22d-512a8cad1f0d" xsi:nil="true"/>
+    <TemplateStatus xmlns="2958f784-0ef9-4616-b22d-512a8cad1f0d">Complete</TemplateStatus>
+    <InternalTagsTaxHTField0 xmlns="2958f784-0ef9-4616-b22d-512a8cad1f0d">
+      <Terms xmlns="http://schemas.microsoft.com/office/infopath/2007/PartnerControls"/>
+    </InternalTagsTaxHTField0>
+    <CSXHash xmlns="2958f784-0ef9-4616-b22d-512a8cad1f0d" xsi:nil="true"/>
+    <Downloads xmlns="2958f784-0ef9-4616-b22d-512a8cad1f0d">0</Downloads>
+    <VoteCount xmlns="2958f784-0ef9-4616-b22d-512a8cad1f0d" xsi:nil="true"/>
+    <OOCacheId xmlns="2958f784-0ef9-4616-b22d-512a8cad1f0d" xsi:nil="true"/>
+    <IsDeleted xmlns="2958f784-0ef9-4616-b22d-512a8cad1f0d">false</IsDeleted>
+    <AssetExpire xmlns="2958f784-0ef9-4616-b22d-512a8cad1f0d">2035-01-01T08:00:00+00:00</AssetExpire>
+    <DSATActionTaken xmlns="2958f784-0ef9-4616-b22d-512a8cad1f0d" xsi:nil="true"/>
+    <CSXSubmissionMarket xmlns="2958f784-0ef9-4616-b22d-512a8cad1f0d" xsi:nil="true"/>
+    <TPExecutable xmlns="2958f784-0ef9-4616-b22d-512a8cad1f0d" xsi:nil="true"/>
+    <SubmitterId xmlns="2958f784-0ef9-4616-b22d-512a8cad1f0d" xsi:nil="true"/>
+    <EditorialTags xmlns="2958f784-0ef9-4616-b22d-512a8cad1f0d" xsi:nil="true"/>
+    <ApprovalLog xmlns="2958f784-0ef9-4616-b22d-512a8cad1f0d" xsi:nil="true"/>
+    <AssetType xmlns="2958f784-0ef9-4616-b22d-512a8cad1f0d">TP</AssetType>
+    <BugNumber xmlns="2958f784-0ef9-4616-b22d-512a8cad1f0d" xsi:nil="true"/>
+    <CSXSubmissionDate xmlns="2958f784-0ef9-4616-b22d-512a8cad1f0d" xsi:nil="true"/>
+    <CSXUpdate xmlns="2958f784-0ef9-4616-b22d-512a8cad1f0d">false</CSXUpdate>
+    <Milestone xmlns="2958f784-0ef9-4616-b22d-512a8cad1f0d" xsi:nil="true"/>
+    <RecommendationsModifier xmlns="2958f784-0ef9-4616-b22d-512a8cad1f0d" xsi:nil="true"/>
+    <OriginAsset xmlns="2958f784-0ef9-4616-b22d-512a8cad1f0d" xsi:nil="true"/>
+    <TPComponent xmlns="2958f784-0ef9-4616-b22d-512a8cad1f0d" xsi:nil="true"/>
+    <AssetId xmlns="2958f784-0ef9-4616-b22d-512a8cad1f0d">TP102801095</AssetId>
+    <IntlLocPriority xmlns="2958f784-0ef9-4616-b22d-512a8cad1f0d" xsi:nil="true"/>
+    <PolicheckWords xmlns="2958f784-0ef9-4616-b22d-512a8cad1f0d" xsi:nil="true"/>
+    <TPLaunchHelpLink xmlns="2958f784-0ef9-4616-b22d-512a8cad1f0d" xsi:nil="true"/>
+    <TPApplication xmlns="2958f784-0ef9-4616-b22d-512a8cad1f0d" xsi:nil="true"/>
+    <HandoffToMSDN xmlns="2958f784-0ef9-4616-b22d-512a8cad1f0d" xsi:nil="true"/>
+    <PlannedPubDate xmlns="2958f784-0ef9-4616-b22d-512a8cad1f0d" xsi:nil="true"/>
+    <IntlLangReviewer xmlns="2958f784-0ef9-4616-b22d-512a8cad1f0d" xsi:nil="true"/>
+    <CrawlForDependencies xmlns="2958f784-0ef9-4616-b22d-512a8cad1f0d">false</CrawlForDependencies>
+    <TrustLevel xmlns="2958f784-0ef9-4616-b22d-512a8cad1f0d">1 Microsoft Managed Content</TrustLevel>
+    <LocLastLocAttemptVersionLookup xmlns="2958f784-0ef9-4616-b22d-512a8cad1f0d">706513</LocLastLocAttemptVersionLookup>
+    <IsSearchable xmlns="2958f784-0ef9-4616-b22d-512a8cad1f0d">true</IsSearchable>
+    <TemplateTemplateType xmlns="2958f784-0ef9-4616-b22d-512a8cad1f0d">PowerPoint 12 Default</TemplateTemplateType>
+    <CampaignTagsTaxHTField0 xmlns="2958f784-0ef9-4616-b22d-512a8cad1f0d">
+      <Terms xmlns="http://schemas.microsoft.com/office/infopath/2007/PartnerControls"/>
+    </CampaignTagsTaxHTField0>
+    <TPNamespace xmlns="2958f784-0ef9-4616-b22d-512a8cad1f0d" xsi:nil="true"/>
+    <TaxCatchAll xmlns="2958f784-0ef9-4616-b22d-512a8cad1f0d"/>
+    <Markets xmlns="2958f784-0ef9-4616-b22d-512a8cad1f0d"/>
+    <UAProjectedTotalWords xmlns="2958f784-0ef9-4616-b22d-512a8cad1f0d" xsi:nil="true"/>
+    <IntlLangReview xmlns="2958f784-0ef9-4616-b22d-512a8cad1f0d">false</IntlLangReview>
+    <OutputCachingOn xmlns="2958f784-0ef9-4616-b22d-512a8cad1f0d">false</OutputCachingOn>
+    <AverageRating xmlns="2958f784-0ef9-4616-b22d-512a8cad1f0d" xsi:nil="true"/>
+    <APAuthor xmlns="2958f784-0ef9-4616-b22d-512a8cad1f0d">
+      <UserInfo>
+        <DisplayName>REDMOND\v-soujap</DisplayName>
+        <AccountId>1954</AccountId>
+        <AccountType/>
+      </UserInfo>
+    </APAuthor>
+    <LocManualTestRequired xmlns="2958f784-0ef9-4616-b22d-512a8cad1f0d">false</LocManualTestRequired>
+    <TPCommandLine xmlns="2958f784-0ef9-4616-b22d-512a8cad1f0d" xsi:nil="true"/>
+    <TPAppVersion xmlns="2958f784-0ef9-4616-b22d-512a8cad1f0d" xsi:nil="true"/>
+    <EditorialStatus xmlns="2958f784-0ef9-4616-b22d-512a8cad1f0d">Complete</EditorialStatus>
+    <LastModifiedDateTime xmlns="2958f784-0ef9-4616-b22d-512a8cad1f0d" xsi:nil="true"/>
+    <ScenarioTagsTaxHTField0 xmlns="2958f784-0ef9-4616-b22d-512a8cad1f0d">
+      <Terms xmlns="http://schemas.microsoft.com/office/infopath/2007/PartnerControls"/>
+    </ScenarioTagsTaxHTField0>
+    <OriginalRelease xmlns="2958f784-0ef9-4616-b22d-512a8cad1f0d">14</OriginalRelease>
+    <TPLaunchHelpLinkType xmlns="2958f784-0ef9-4616-b22d-512a8cad1f0d">Template</TPLaunchHelpLinkType>
+    <LocalizationTagsTaxHTField0 xmlns="2958f784-0ef9-4616-b22d-512a8cad1f0d">
+      <Terms xmlns="http://schemas.microsoft.com/office/infopath/2007/PartnerControls"/>
+    </LocalizationTagsTaxHTField0>
+    <UACurrentWords xmlns="2958f784-0ef9-4616-b22d-512a8cad1f0d" xsi:nil="true"/>
+    <ArtSampleDocs xmlns="2958f784-0ef9-4616-b22d-512a8cad1f0d" xsi:nil="true"/>
+    <UALocRecommendation xmlns="2958f784-0ef9-4616-b22d-512a8cad1f0d">Localize</UALocRecommendation>
+    <Manager xmlns="2958f784-0ef9-4616-b22d-512a8cad1f0d" xsi:nil="true"/>
+    <Description0 xmlns="fb5acd76-e9f3-4601-9d69-91f53ab96ae6" xsi:nil="true"/>
+    <Component xmlns="fb5acd76-e9f3-4601-9d69-91f53ab96ae6" xsi:nil="true"/>
+    <LocMarketGroupTiers2 xmlns="2958f784-0ef9-4616-b22d-512a8cad1f0d" xsi:nil="true"/>
+  </documentManagement>
+</p:properties>
+</file>
+
+<file path=customXml/item2.xml><?xml version="1.0" encoding="utf-8"?>
 <ct:contentTypeSchema xmlns:ct="http://schemas.microsoft.com/office/2006/metadata/contentType" xmlns:ma="http://schemas.microsoft.com/office/2006/metadata/properties/metaAttributes" ct:_="" ma:_="" ma:contentTypeName="TemplateFile" ma:contentTypeID="0x010100DE95A0C693CEB341887D38A4A2B58B45040072C752107C5A7B47AA91A1EE638E6F1F" ma:contentTypeVersion="55" ma:contentTypeDescription="Create a new document." ma:contentTypeScope="" ma:versionID="3c98c83416931a21d43ed007fda5e4dd">
   <xsd:schema xmlns:xsd="http://www.w3.org/2001/XMLSchema" xmlns:xs="http://www.w3.org/2001/XMLSchema" xmlns:p="http://schemas.microsoft.com/office/2006/metadata/properties" xmlns:ns2="2958f784-0ef9-4616-b22d-512a8cad1f0d" xmlns:ns3="fb5acd76-e9f3-4601-9d69-91f53ab96ae6" targetNamespace="http://schemas.microsoft.com/office/2006/metadata/properties" ma:root="true" ma:fieldsID="938018c4f46d99993d20879d4e9ddff8" ns2:_="" ns3:_="">
     <xsd:import namespace="2958f784-0ef9-4616-b22d-512a8cad1f0d"/>
@@ -28272,134 +28427,6 @@
 </ct:contentTypeSchema>
 </file>
 
-<file path=customXml/item2.xml><?xml version="1.0" encoding="utf-8"?>
-<p:properties xmlns:p="http://schemas.microsoft.com/office/2006/metadata/properties" xmlns:xsi="http://www.w3.org/2001/XMLSchema-instance" xmlns:pc="http://schemas.microsoft.com/office/infopath/2007/PartnerControls">
-  <documentManagement>
-    <DirectSourceMarket xmlns="2958f784-0ef9-4616-b22d-512a8cad1f0d">english</DirectSourceMarket>
-    <ApprovalStatus xmlns="2958f784-0ef9-4616-b22d-512a8cad1f0d">InProgress</ApprovalStatus>
-    <MarketSpecific xmlns="2958f784-0ef9-4616-b22d-512a8cad1f0d">false</MarketSpecific>
-    <LocComments xmlns="2958f784-0ef9-4616-b22d-512a8cad1f0d" xsi:nil="true"/>
-    <ThumbnailAssetId xmlns="2958f784-0ef9-4616-b22d-512a8cad1f0d" xsi:nil="true"/>
-    <PrimaryImageGen xmlns="2958f784-0ef9-4616-b22d-512a8cad1f0d">false</PrimaryImageGen>
-    <LegacyData xmlns="2958f784-0ef9-4616-b22d-512a8cad1f0d" xsi:nil="true"/>
-    <LocRecommendedHandoff xmlns="2958f784-0ef9-4616-b22d-512a8cad1f0d" xsi:nil="true"/>
-    <BusinessGroup xmlns="2958f784-0ef9-4616-b22d-512a8cad1f0d" xsi:nil="true"/>
-    <BlockPublish xmlns="2958f784-0ef9-4616-b22d-512a8cad1f0d">false</BlockPublish>
-    <TPFriendlyName xmlns="2958f784-0ef9-4616-b22d-512a8cad1f0d" xsi:nil="true"/>
-    <NumericId xmlns="2958f784-0ef9-4616-b22d-512a8cad1f0d" xsi:nil="true"/>
-    <APEditor xmlns="2958f784-0ef9-4616-b22d-512a8cad1f0d">
-      <UserInfo>
-        <DisplayName/>
-        <AccountId xsi:nil="true"/>
-        <AccountType/>
-      </UserInfo>
-    </APEditor>
-    <SourceTitle xmlns="2958f784-0ef9-4616-b22d-512a8cad1f0d" xsi:nil="true"/>
-    <OpenTemplate xmlns="2958f784-0ef9-4616-b22d-512a8cad1f0d">true</OpenTemplate>
-    <UALocComments xmlns="2958f784-0ef9-4616-b22d-512a8cad1f0d" xsi:nil="true"/>
-    <ParentAssetId xmlns="2958f784-0ef9-4616-b22d-512a8cad1f0d" xsi:nil="true"/>
-    <IntlLangReviewDate xmlns="2958f784-0ef9-4616-b22d-512a8cad1f0d" xsi:nil="true"/>
-    <FeatureTagsTaxHTField0 xmlns="2958f784-0ef9-4616-b22d-512a8cad1f0d">
-      <Terms xmlns="http://schemas.microsoft.com/office/infopath/2007/PartnerControls"/>
-    </FeatureTagsTaxHTField0>
-    <PublishStatusLookup xmlns="2958f784-0ef9-4616-b22d-512a8cad1f0d">
-      <Value>631916</Value>
-    </PublishStatusLookup>
-    <Providers xmlns="2958f784-0ef9-4616-b22d-512a8cad1f0d" xsi:nil="true"/>
-    <MachineTranslated xmlns="2958f784-0ef9-4616-b22d-512a8cad1f0d">false</MachineTranslated>
-    <OriginalSourceMarket xmlns="2958f784-0ef9-4616-b22d-512a8cad1f0d">english</OriginalSourceMarket>
-    <APDescription xmlns="2958f784-0ef9-4616-b22d-512a8cad1f0d" xsi:nil="true"/>
-    <ClipArtFilename xmlns="2958f784-0ef9-4616-b22d-512a8cad1f0d" xsi:nil="true"/>
-    <ContentItem xmlns="2958f784-0ef9-4616-b22d-512a8cad1f0d" xsi:nil="true"/>
-    <TPInstallLocation xmlns="2958f784-0ef9-4616-b22d-512a8cad1f0d" xsi:nil="true"/>
-    <PublishTargets xmlns="2958f784-0ef9-4616-b22d-512a8cad1f0d">OfficeOnlineVNext</PublishTargets>
-    <TimesCloned xmlns="2958f784-0ef9-4616-b22d-512a8cad1f0d" xsi:nil="true"/>
-    <AssetStart xmlns="2958f784-0ef9-4616-b22d-512a8cad1f0d">2011-12-12T13:37:00+00:00</AssetStart>
-    <Provider xmlns="2958f784-0ef9-4616-b22d-512a8cad1f0d" xsi:nil="true"/>
-    <AcquiredFrom xmlns="2958f784-0ef9-4616-b22d-512a8cad1f0d">Internal MS</AcquiredFrom>
-    <FriendlyTitle xmlns="2958f784-0ef9-4616-b22d-512a8cad1f0d" xsi:nil="true"/>
-    <LastHandOff xmlns="2958f784-0ef9-4616-b22d-512a8cad1f0d" xsi:nil="true"/>
-    <TPClientViewer xmlns="2958f784-0ef9-4616-b22d-512a8cad1f0d" xsi:nil="true"/>
-    <ShowIn xmlns="2958f784-0ef9-4616-b22d-512a8cad1f0d">Show everywhere</ShowIn>
-    <UANotes xmlns="2958f784-0ef9-4616-b22d-512a8cad1f0d" xsi:nil="true"/>
-    <TemplateStatus xmlns="2958f784-0ef9-4616-b22d-512a8cad1f0d">Complete</TemplateStatus>
-    <InternalTagsTaxHTField0 xmlns="2958f784-0ef9-4616-b22d-512a8cad1f0d">
-      <Terms xmlns="http://schemas.microsoft.com/office/infopath/2007/PartnerControls"/>
-    </InternalTagsTaxHTField0>
-    <CSXHash xmlns="2958f784-0ef9-4616-b22d-512a8cad1f0d" xsi:nil="true"/>
-    <Downloads xmlns="2958f784-0ef9-4616-b22d-512a8cad1f0d">0</Downloads>
-    <VoteCount xmlns="2958f784-0ef9-4616-b22d-512a8cad1f0d" xsi:nil="true"/>
-    <OOCacheId xmlns="2958f784-0ef9-4616-b22d-512a8cad1f0d" xsi:nil="true"/>
-    <IsDeleted xmlns="2958f784-0ef9-4616-b22d-512a8cad1f0d">false</IsDeleted>
-    <AssetExpire xmlns="2958f784-0ef9-4616-b22d-512a8cad1f0d">2035-01-01T08:00:00+00:00</AssetExpire>
-    <DSATActionTaken xmlns="2958f784-0ef9-4616-b22d-512a8cad1f0d" xsi:nil="true"/>
-    <CSXSubmissionMarket xmlns="2958f784-0ef9-4616-b22d-512a8cad1f0d" xsi:nil="true"/>
-    <TPExecutable xmlns="2958f784-0ef9-4616-b22d-512a8cad1f0d" xsi:nil="true"/>
-    <SubmitterId xmlns="2958f784-0ef9-4616-b22d-512a8cad1f0d" xsi:nil="true"/>
-    <EditorialTags xmlns="2958f784-0ef9-4616-b22d-512a8cad1f0d" xsi:nil="true"/>
-    <ApprovalLog xmlns="2958f784-0ef9-4616-b22d-512a8cad1f0d" xsi:nil="true"/>
-    <AssetType xmlns="2958f784-0ef9-4616-b22d-512a8cad1f0d">TP</AssetType>
-    <BugNumber xmlns="2958f784-0ef9-4616-b22d-512a8cad1f0d" xsi:nil="true"/>
-    <CSXSubmissionDate xmlns="2958f784-0ef9-4616-b22d-512a8cad1f0d" xsi:nil="true"/>
-    <CSXUpdate xmlns="2958f784-0ef9-4616-b22d-512a8cad1f0d">false</CSXUpdate>
-    <Milestone xmlns="2958f784-0ef9-4616-b22d-512a8cad1f0d" xsi:nil="true"/>
-    <RecommendationsModifier xmlns="2958f784-0ef9-4616-b22d-512a8cad1f0d" xsi:nil="true"/>
-    <OriginAsset xmlns="2958f784-0ef9-4616-b22d-512a8cad1f0d" xsi:nil="true"/>
-    <TPComponent xmlns="2958f784-0ef9-4616-b22d-512a8cad1f0d" xsi:nil="true"/>
-    <AssetId xmlns="2958f784-0ef9-4616-b22d-512a8cad1f0d">TP102801095</AssetId>
-    <IntlLocPriority xmlns="2958f784-0ef9-4616-b22d-512a8cad1f0d" xsi:nil="true"/>
-    <PolicheckWords xmlns="2958f784-0ef9-4616-b22d-512a8cad1f0d" xsi:nil="true"/>
-    <TPLaunchHelpLink xmlns="2958f784-0ef9-4616-b22d-512a8cad1f0d" xsi:nil="true"/>
-    <TPApplication xmlns="2958f784-0ef9-4616-b22d-512a8cad1f0d" xsi:nil="true"/>
-    <HandoffToMSDN xmlns="2958f784-0ef9-4616-b22d-512a8cad1f0d" xsi:nil="true"/>
-    <PlannedPubDate xmlns="2958f784-0ef9-4616-b22d-512a8cad1f0d" xsi:nil="true"/>
-    <IntlLangReviewer xmlns="2958f784-0ef9-4616-b22d-512a8cad1f0d" xsi:nil="true"/>
-    <CrawlForDependencies xmlns="2958f784-0ef9-4616-b22d-512a8cad1f0d">false</CrawlForDependencies>
-    <TrustLevel xmlns="2958f784-0ef9-4616-b22d-512a8cad1f0d">1 Microsoft Managed Content</TrustLevel>
-    <LocLastLocAttemptVersionLookup xmlns="2958f784-0ef9-4616-b22d-512a8cad1f0d">706513</LocLastLocAttemptVersionLookup>
-    <IsSearchable xmlns="2958f784-0ef9-4616-b22d-512a8cad1f0d">true</IsSearchable>
-    <TemplateTemplateType xmlns="2958f784-0ef9-4616-b22d-512a8cad1f0d">PowerPoint 12 Default</TemplateTemplateType>
-    <CampaignTagsTaxHTField0 xmlns="2958f784-0ef9-4616-b22d-512a8cad1f0d">
-      <Terms xmlns="http://schemas.microsoft.com/office/infopath/2007/PartnerControls"/>
-    </CampaignTagsTaxHTField0>
-    <TPNamespace xmlns="2958f784-0ef9-4616-b22d-512a8cad1f0d" xsi:nil="true"/>
-    <TaxCatchAll xmlns="2958f784-0ef9-4616-b22d-512a8cad1f0d"/>
-    <Markets xmlns="2958f784-0ef9-4616-b22d-512a8cad1f0d"/>
-    <UAProjectedTotalWords xmlns="2958f784-0ef9-4616-b22d-512a8cad1f0d" xsi:nil="true"/>
-    <IntlLangReview xmlns="2958f784-0ef9-4616-b22d-512a8cad1f0d">false</IntlLangReview>
-    <OutputCachingOn xmlns="2958f784-0ef9-4616-b22d-512a8cad1f0d">false</OutputCachingOn>
-    <AverageRating xmlns="2958f784-0ef9-4616-b22d-512a8cad1f0d" xsi:nil="true"/>
-    <APAuthor xmlns="2958f784-0ef9-4616-b22d-512a8cad1f0d">
-      <UserInfo>
-        <DisplayName>REDMOND\v-soujap</DisplayName>
-        <AccountId>1954</AccountId>
-        <AccountType/>
-      </UserInfo>
-    </APAuthor>
-    <LocManualTestRequired xmlns="2958f784-0ef9-4616-b22d-512a8cad1f0d">false</LocManualTestRequired>
-    <TPCommandLine xmlns="2958f784-0ef9-4616-b22d-512a8cad1f0d" xsi:nil="true"/>
-    <TPAppVersion xmlns="2958f784-0ef9-4616-b22d-512a8cad1f0d" xsi:nil="true"/>
-    <EditorialStatus xmlns="2958f784-0ef9-4616-b22d-512a8cad1f0d">Complete</EditorialStatus>
-    <LastModifiedDateTime xmlns="2958f784-0ef9-4616-b22d-512a8cad1f0d" xsi:nil="true"/>
-    <ScenarioTagsTaxHTField0 xmlns="2958f784-0ef9-4616-b22d-512a8cad1f0d">
-      <Terms xmlns="http://schemas.microsoft.com/office/infopath/2007/PartnerControls"/>
-    </ScenarioTagsTaxHTField0>
-    <OriginalRelease xmlns="2958f784-0ef9-4616-b22d-512a8cad1f0d">14</OriginalRelease>
-    <TPLaunchHelpLinkType xmlns="2958f784-0ef9-4616-b22d-512a8cad1f0d">Template</TPLaunchHelpLinkType>
-    <LocalizationTagsTaxHTField0 xmlns="2958f784-0ef9-4616-b22d-512a8cad1f0d">
-      <Terms xmlns="http://schemas.microsoft.com/office/infopath/2007/PartnerControls"/>
-    </LocalizationTagsTaxHTField0>
-    <UACurrentWords xmlns="2958f784-0ef9-4616-b22d-512a8cad1f0d" xsi:nil="true"/>
-    <ArtSampleDocs xmlns="2958f784-0ef9-4616-b22d-512a8cad1f0d" xsi:nil="true"/>
-    <UALocRecommendation xmlns="2958f784-0ef9-4616-b22d-512a8cad1f0d">Localize</UALocRecommendation>
-    <Manager xmlns="2958f784-0ef9-4616-b22d-512a8cad1f0d" xsi:nil="true"/>
-    <Description0 xmlns="fb5acd76-e9f3-4601-9d69-91f53ab96ae6" xsi:nil="true"/>
-    <Component xmlns="fb5acd76-e9f3-4601-9d69-91f53ab96ae6" xsi:nil="true"/>
-    <LocMarketGroupTiers2 xmlns="2958f784-0ef9-4616-b22d-512a8cad1f0d" xsi:nil="true"/>
-  </documentManagement>
-</p:properties>
-</file>
-
 <file path=customXml/item3.xml><?xml version="1.0" encoding="utf-8"?>
 <?mso-contentType ?>
 <FormTemplates xmlns="http://schemas.microsoft.com/sharepoint/v3/contenttype/forms">
@@ -28410,6 +28437,17 @@
 </file>
 
 <file path=customXml/itemProps1.xml><?xml version="1.0" encoding="utf-8"?>
+<ds:datastoreItem xmlns:ds="http://schemas.openxmlformats.org/officeDocument/2006/customXml" ds:itemID="{7F167837-5CC0-4111-8184-E835CFFE8FFF}">
+  <ds:schemaRefs>
+    <ds:schemaRef ds:uri="http://schemas.microsoft.com/office/2006/metadata/properties"/>
+    <ds:schemaRef ds:uri="http://schemas.microsoft.com/office/infopath/2007/PartnerControls"/>
+    <ds:schemaRef ds:uri="2958f784-0ef9-4616-b22d-512a8cad1f0d"/>
+    <ds:schemaRef ds:uri="fb5acd76-e9f3-4601-9d69-91f53ab96ae6"/>
+  </ds:schemaRefs>
+</ds:datastoreItem>
+</file>
+
+<file path=customXml/itemProps2.xml><?xml version="1.0" encoding="utf-8"?>
 <ds:datastoreItem xmlns:ds="http://schemas.openxmlformats.org/officeDocument/2006/customXml" ds:itemID="{4C9D3AD1-7023-4D9A-9A2C-621065547747}">
   <ds:schemaRefs>
     <ds:schemaRef ds:uri="http://schemas.microsoft.com/office/2006/metadata/contentType"/>
@@ -28428,17 +28466,6 @@
 </ds:datastoreItem>
 </file>
 
-<file path=customXml/itemProps2.xml><?xml version="1.0" encoding="utf-8"?>
-<ds:datastoreItem xmlns:ds="http://schemas.openxmlformats.org/officeDocument/2006/customXml" ds:itemID="{7F167837-5CC0-4111-8184-E835CFFE8FFF}">
-  <ds:schemaRefs>
-    <ds:schemaRef ds:uri="http://schemas.microsoft.com/office/2006/metadata/properties"/>
-    <ds:schemaRef ds:uri="http://schemas.microsoft.com/office/infopath/2007/PartnerControls"/>
-    <ds:schemaRef ds:uri="2958f784-0ef9-4616-b22d-512a8cad1f0d"/>
-    <ds:schemaRef ds:uri="fb5acd76-e9f3-4601-9d69-91f53ab96ae6"/>
-  </ds:schemaRefs>
-</ds:datastoreItem>
-</file>
-
 <file path=customXml/itemProps3.xml><?xml version="1.0" encoding="utf-8"?>
 <ds:datastoreItem xmlns:ds="http://schemas.openxmlformats.org/officeDocument/2006/customXml" ds:itemID="{81982DA8-EA6C-4E78-95DD-332D1E54B43B}">
   <ds:schemaRefs>
